--- a/docs/materials/Superdry_SVS_Optimisation_Areas.pptx
+++ b/docs/materials/Superdry_SVS_Optimisation_Areas.pptx
@@ -11045,7 +11045,7 @@
             <a:spLocks noGrp="1"/>
           </p:cNvSpPr>
           <p:nvPr>
-            <p:ph type="body" idx="13"/>
+            <p:ph type="body" idx="11"/>
           </p:nvPr>
         </p:nvSpPr>
         <p:spPr/>
@@ -11066,259 +11066,6 @@
             <a:spLocks noGrp="1"/>
           </p:cNvSpPr>
           <p:nvPr>
-            <p:ph type="body" idx="1"/>
-          </p:nvPr>
-        </p:nvSpPr>
-        <p:spPr/>
-        <p:txBody>
-          <a:bodyPr wrap="square"/>
-          <a:lstStyle/>
-          <a:p>
-            <a:r>
-              <a:t>AI content optimisation</a:t>
-            </a:r>
-          </a:p>
-        </p:txBody>
-      </p:sp>
-      <p:sp>
-        <p:nvSpPr>
-          <p:cNvPr id="5" name="Text Placeholder 4"/>
-          <p:cNvSpPr>
-            <a:spLocks noGrp="1"/>
-          </p:cNvSpPr>
-          <p:nvPr>
-            <p:ph type="body" idx="2"/>
-          </p:nvPr>
-        </p:nvSpPr>
-        <p:spPr/>
-        <p:txBody>
-          <a:bodyPr wrap="square"/>
-          <a:lstStyle/>
-          <a:p>
-            <a:r>
-              <a:rPr sz="1320"/>
-              <a:t>Search-intent titles, 500+ character descriptions, visual attributes read from imagery. Tachyon tiers — Basic, Medium, Advanced — per cohort.</a:t>
-            </a:r>
-          </a:p>
-        </p:txBody>
-      </p:sp>
-      <p:sp>
-        <p:nvSpPr>
-          <p:cNvPr id="6" name="Text Placeholder 5"/>
-          <p:cNvSpPr>
-            <a:spLocks noGrp="1"/>
-          </p:cNvSpPr>
-          <p:nvPr>
-            <p:ph type="body" idx="3"/>
-          </p:nvPr>
-        </p:nvSpPr>
-        <p:spPr/>
-        <p:txBody>
-          <a:bodyPr wrap="square"/>
-          <a:lstStyle/>
-          <a:p>
-            <a:r>
-              <a:t>Conversational attributes</a:t>
-            </a:r>
-          </a:p>
-        </p:txBody>
-      </p:sp>
-      <p:sp>
-        <p:nvSpPr>
-          <p:cNvPr id="7" name="Text Placeholder 6"/>
-          <p:cNvSpPr>
-            <a:spLocks noGrp="1"/>
-          </p:cNvSpPr>
-          <p:nvPr>
-            <p:ph type="body" idx="4"/>
-          </p:nvPr>
-        </p:nvSpPr>
-        <p:spPr/>
-        <p:txBody>
-          <a:bodyPr wrap="square"/>
-          <a:lstStyle/>
-          <a:p>
-            <a:r>
-              <a:t>item_group_title, variant_option, related_product, question_and_answer — the fields Google reads for AI answers.</a:t>
-            </a:r>
-          </a:p>
-        </p:txBody>
-      </p:sp>
-      <p:sp>
-        <p:nvSpPr>
-          <p:cNvPr id="8" name="Text Placeholder 7"/>
-          <p:cNvSpPr>
-            <a:spLocks noGrp="1"/>
-          </p:cNvSpPr>
-          <p:nvPr>
-            <p:ph type="body" idx="5"/>
-          </p:nvPr>
-        </p:nvSpPr>
-        <p:spPr/>
-        <p:txBody>
-          <a:bodyPr wrap="square"/>
-          <a:lstStyle/>
-          <a:p>
-            <a:r>
-              <a:t>Overlay services</a:t>
-            </a:r>
-          </a:p>
-        </p:txBody>
-      </p:sp>
-      <p:sp>
-        <p:nvSpPr>
-          <p:cNvPr id="9" name="Text Placeholder 8"/>
-          <p:cNvSpPr>
-            <a:spLocks noGrp="1"/>
-          </p:cNvSpPr>
-          <p:nvPr>
-            <p:ph type="body" idx="6"/>
-          </p:nvPr>
-        </p:nvSpPr>
-        <p:spPr/>
-        <p:txBody>
-          <a:bodyPr wrap="square"/>
-          <a:lstStyle/>
-          <a:p>
-            <a:r>
-              <a:t>Dynamic stock and countdown overlays on Social; promo overlays in the Shopping carousel. Mock-ups shared, PPC in test.</a:t>
-            </a:r>
-          </a:p>
-        </p:txBody>
-      </p:sp>
-      <p:sp>
-        <p:nvSpPr>
-          <p:cNvPr id="10" name="Text Placeholder 9"/>
-          <p:cNvSpPr>
-            <a:spLocks noGrp="1"/>
-          </p:cNvSpPr>
-          <p:nvPr>
-            <p:ph type="body" idx="7"/>
-          </p:nvPr>
-        </p:nvSpPr>
-        <p:spPr/>
-        <p:txBody>
-          <a:bodyPr wrap="square"/>
-          <a:lstStyle/>
-          <a:p>
-            <a:r>
-              <a:t>Keyword &amp; peak planning</a:t>
-            </a:r>
-          </a:p>
-        </p:txBody>
-      </p:sp>
-      <p:sp>
-        <p:nvSpPr>
-          <p:cNvPr id="11" name="Text Placeholder 10"/>
-          <p:cNvSpPr>
-            <a:spLocks noGrp="1"/>
-          </p:cNvSpPr>
-          <p:nvPr>
-            <p:ph type="body" idx="8"/>
-          </p:nvPr>
-        </p:nvSpPr>
-        <p:spPr/>
-        <p:txBody>
-          <a:bodyPr wrap="square"/>
-          <a:lstStyle/>
-          <a:p>
-            <a:r>
-              <a:t>Rolling six-month keyword planner to 70–80% product-type saturation, aligned to Black Friday and Christmas.</a:t>
-            </a:r>
-          </a:p>
-        </p:txBody>
-      </p:sp>
-      <p:sp>
-        <p:nvSpPr>
-          <p:cNvPr id="12" name="Text Placeholder 11"/>
-          <p:cNvSpPr>
-            <a:spLocks noGrp="1"/>
-          </p:cNvSpPr>
-          <p:nvPr>
-            <p:ph type="body" idx="9"/>
-          </p:nvPr>
-        </p:nvSpPr>
-        <p:spPr/>
-        <p:txBody>
-          <a:bodyPr wrap="square"/>
-          <a:lstStyle/>
-          <a:p>
-            <a:r>
-              <a:t>ALP — landing pages</a:t>
-            </a:r>
-          </a:p>
-        </p:txBody>
-      </p:sp>
-      <p:sp>
-        <p:nvSpPr>
-          <p:cNvPr id="13" name="Text Placeholder 12"/>
-          <p:cNvSpPr>
-            <a:spLocks noGrp="1"/>
-          </p:cNvSpPr>
-          <p:nvPr>
-            <p:ph type="body" idx="10"/>
-          </p:nvPr>
-        </p:nvSpPr>
-        <p:spPr/>
-        <p:txBody>
-          <a:bodyPr wrap="square"/>
-          <a:lstStyle/>
-          <a:p>
-            <a:r>
-              <a:t>Route Shopping traffic to category pages, not product pages: longer dwell, stronger conversion. Not yet scoped.</a:t>
-            </a:r>
-          </a:p>
-        </p:txBody>
-      </p:sp>
-      <p:sp>
-        <p:nvSpPr>
-          <p:cNvPr id="14" name="Text Placeholder 13"/>
-          <p:cNvSpPr>
-            <a:spLocks noGrp="1"/>
-          </p:cNvSpPr>
-          <p:nvPr>
-            <p:ph type="body" idx="11"/>
-          </p:nvPr>
-        </p:nvSpPr>
-        <p:spPr/>
-        <p:txBody>
-          <a:bodyPr wrap="square"/>
-          <a:lstStyle/>
-          <a:p>
-            <a:r>
-              <a:t>LIA reactivation</a:t>
-            </a:r>
-          </a:p>
-        </p:txBody>
-      </p:sp>
-      <p:sp>
-        <p:nvSpPr>
-          <p:cNvPr id="15" name="Text Placeholder 14"/>
-          <p:cNvSpPr>
-            <a:spLocks noGrp="1"/>
-          </p:cNvSpPr>
-          <p:nvPr>
-            <p:ph type="body" idx="12"/>
-          </p:nvPr>
-        </p:nvSpPr>
-        <p:spPr/>
-        <p:txBody>
-          <a:bodyPr wrap="square"/>
-          <a:lstStyle/>
-          <a:p>
-            <a:r>
-              <a:t>Lock down store-ID and stock-inventory requirements. The newest lane, open since the two-year review.</a:t>
-            </a:r>
-          </a:p>
-        </p:txBody>
-      </p:sp>
-      <p:sp>
-        <p:nvSpPr>
-          <p:cNvPr id="16" name="Text Placeholder 15"/>
-          <p:cNvSpPr>
-            <a:spLocks noGrp="1"/>
-          </p:cNvSpPr>
-          <p:nvPr>
             <p:ph type="body" idx="14"/>
           </p:nvPr>
         </p:nvSpPr>
@@ -11333,6 +11080,544 @@
           </a:p>
         </p:txBody>
       </p:sp>
+      <p:graphicFrame>
+        <p:nvGraphicFramePr>
+          <p:cNvPr id="5" name="Table 4"/>
+          <p:cNvGraphicFramePr>
+            <a:graphicFrameLocks noGrp="1"/>
+          </p:cNvGraphicFramePr>
+          <p:nvPr/>
+        </p:nvGraphicFramePr>
+        <p:xfrm>
+          <a:off x="612648" y="1847088"/>
+          <a:ext cx="10972798" cy="3794760"/>
+        </p:xfrm>
+        <a:graphic>
+          <a:graphicData uri="http://schemas.openxmlformats.org/drawingml/2006/table">
+            <a:tbl>
+              <a:tblPr firstRow="1" bandRow="1">
+                <a:tableStyleId>{5C22544A-7EE6-4342-B048-85BDC9FD1C3A}</a:tableStyleId>
+              </a:tblPr>
+              <a:tblGrid>
+                <a:gridCol w="2049841"/>
+                <a:gridCol w="901930"/>
+                <a:gridCol w="2377815"/>
+                <a:gridCol w="4837625"/>
+                <a:gridCol w="805587"/>
+              </a:tblGrid>
+              <a:tr h="384048">
+                <a:tc>
+                  <a:txBody>
+                    <a:bodyPr/>
+                    <a:lstStyle/>
+                    <a:p>
+                      <a:r>
+                        <a:rPr sz="1300" b="1">
+                          <a:solidFill>
+                            <a:srgbClr val="FFFFFF"/>
+                          </a:solidFill>
+                        </a:rPr>
+                        <a:t>Area</a:t>
+                      </a:r>
+                    </a:p>
+                  </a:txBody>
+                  <a:tcPr>
+                    <a:solidFill>
+                      <a:srgbClr val="0F172A"/>
+                    </a:solidFill>
+                  </a:tcPr>
+                </a:tc>
+                <a:tc>
+                  <a:txBody>
+                    <a:bodyPr/>
+                    <a:lstStyle/>
+                    <a:p>
+                      <a:r>
+                        <a:rPr sz="1300" b="1">
+                          <a:solidFill>
+                            <a:srgbClr val="FFFFFF"/>
+                          </a:solidFill>
+                        </a:rPr>
+                        <a:t>Actions</a:t>
+                      </a:r>
+                    </a:p>
+                  </a:txBody>
+                  <a:tcPr>
+                    <a:solidFill>
+                      <a:srgbClr val="0F172A"/>
+                    </a:solidFill>
+                  </a:tcPr>
+                </a:tc>
+                <a:tc>
+                  <a:txBody>
+                    <a:bodyPr/>
+                    <a:lstStyle/>
+                    <a:p>
+                      <a:r>
+                        <a:rPr sz="1300" b="1">
+                          <a:solidFill>
+                            <a:srgbClr val="FFFFFF"/>
+                          </a:solidFill>
+                        </a:rPr>
+                        <a:t>Outcome</a:t>
+                      </a:r>
+                    </a:p>
+                  </a:txBody>
+                  <a:tcPr>
+                    <a:solidFill>
+                      <a:srgbClr val="0F172A"/>
+                    </a:solidFill>
+                  </a:tcPr>
+                </a:tc>
+                <a:tc>
+                  <a:txBody>
+                    <a:bodyPr/>
+                    <a:lstStyle/>
+                    <a:p>
+                      <a:r>
+                        <a:rPr sz="1300" b="1">
+                          <a:solidFill>
+                            <a:srgbClr val="FFFFFF"/>
+                          </a:solidFill>
+                        </a:rPr>
+                        <a:t>Stage progress</a:t>
+                      </a:r>
+                    </a:p>
+                  </a:txBody>
+                  <a:tcPr>
+                    <a:solidFill>
+                      <a:srgbClr val="0F172A"/>
+                    </a:solidFill>
+                  </a:tcPr>
+                </a:tc>
+                <a:tc>
+                  <a:txBody>
+                    <a:bodyPr/>
+                    <a:lstStyle/>
+                    <a:p>
+                      <a:r>
+                        <a:rPr sz="1300" b="1">
+                          <a:solidFill>
+                            <a:srgbClr val="FFFFFF"/>
+                          </a:solidFill>
+                        </a:rPr>
+                        <a:t>Finance</a:t>
+                      </a:r>
+                    </a:p>
+                  </a:txBody>
+                  <a:tcPr>
+                    <a:solidFill>
+                      <a:srgbClr val="0F172A"/>
+                    </a:solidFill>
+                  </a:tcPr>
+                </a:tc>
+              </a:tr>
+              <a:tr h="568452">
+                <a:tc>
+                  <a:txBody>
+                    <a:bodyPr/>
+                    <a:lstStyle/>
+                    <a:p>
+                      <a:r>
+                        <a:rPr sz="1100"/>
+                        <a:t>AI content optimisation</a:t>
+                      </a:r>
+                    </a:p>
+                  </a:txBody>
+                  <a:tcPr/>
+                </a:tc>
+                <a:tc>
+                  <a:txBody>
+                    <a:bodyPr/>
+                    <a:lstStyle/>
+                    <a:p>
+                      <a:r>
+                        <a:rPr sz="1100"/>
+                        <a:t>T1–T4</a:t>
+                      </a:r>
+                    </a:p>
+                  </a:txBody>
+                  <a:tcPr/>
+                </a:tc>
+                <a:tc>
+                  <a:txBody>
+                    <a:bodyPr/>
+                    <a:lstStyle/>
+                    <a:p>
+                      <a:r>
+                        <a:rPr sz="1100"/>
+                        <a:t>CTR, impressions</a:t>
+                      </a:r>
+                    </a:p>
+                  </a:txBody>
+                  <a:tcPr/>
+                </a:tc>
+                <a:tc>
+                  <a:txBody>
+                    <a:bodyPr/>
+                    <a:lstStyle/>
+                    <a:p>
+                      <a:r>
+                        <a:rPr sz="1100"/>
+                        <a:t>Open — none started</a:t>
+                      </a:r>
+                    </a:p>
+                  </a:txBody>
+                  <a:tcPr/>
+                </a:tc>
+                <a:tc>
+                  <a:txBody>
+                    <a:bodyPr/>
+                    <a:lstStyle/>
+                    <a:p>
+                      <a:r>
+                        <a:rPr sz="1100"/>
+                        <a:t>TBC</a:t>
+                      </a:r>
+                    </a:p>
+                  </a:txBody>
+                  <a:tcPr/>
+                </a:tc>
+              </a:tr>
+              <a:tr h="568452">
+                <a:tc>
+                  <a:txBody>
+                    <a:bodyPr/>
+                    <a:lstStyle/>
+                    <a:p>
+                      <a:r>
+                        <a:rPr sz="1100"/>
+                        <a:t>Conversational attributes</a:t>
+                      </a:r>
+                    </a:p>
+                  </a:txBody>
+                  <a:tcPr/>
+                </a:tc>
+                <a:tc>
+                  <a:txBody>
+                    <a:bodyPr/>
+                    <a:lstStyle/>
+                    <a:p>
+                      <a:r>
+                        <a:rPr sz="1100"/>
+                        <a:t>T6, T7, T10</a:t>
+                      </a:r>
+                    </a:p>
+                  </a:txBody>
+                  <a:tcPr/>
+                </a:tc>
+                <a:tc>
+                  <a:txBody>
+                    <a:bodyPr/>
+                    <a:lstStyle/>
+                    <a:p>
+                      <a:r>
+                        <a:rPr sz="1100"/>
+                        <a:t>Cross-sell, AOV, AI citations</a:t>
+                      </a:r>
+                    </a:p>
+                  </a:txBody>
+                  <a:tcPr/>
+                </a:tc>
+                <a:tc>
+                  <a:txBody>
+                    <a:bodyPr/>
+                    <a:lstStyle/>
+                    <a:p>
+                      <a:r>
+                        <a:rPr sz="1100"/>
+                        <a:t>Open — none started</a:t>
+                      </a:r>
+                    </a:p>
+                  </a:txBody>
+                  <a:tcPr/>
+                </a:tc>
+                <a:tc>
+                  <a:txBody>
+                    <a:bodyPr/>
+                    <a:lstStyle/>
+                    <a:p>
+                      <a:r>
+                        <a:rPr sz="1100"/>
+                        <a:t>TBC</a:t>
+                      </a:r>
+                    </a:p>
+                  </a:txBody>
+                  <a:tcPr/>
+                </a:tc>
+              </a:tr>
+              <a:tr h="568452">
+                <a:tc>
+                  <a:txBody>
+                    <a:bodyPr/>
+                    <a:lstStyle/>
+                    <a:p>
+                      <a:r>
+                        <a:rPr sz="1100"/>
+                        <a:t>Overlay services</a:t>
+                      </a:r>
+                    </a:p>
+                  </a:txBody>
+                  <a:tcPr/>
+                </a:tc>
+                <a:tc>
+                  <a:txBody>
+                    <a:bodyPr/>
+                    <a:lstStyle/>
+                    <a:p>
+                      <a:r>
+                        <a:rPr sz="1100"/>
+                        <a:t>T9, T11</a:t>
+                      </a:r>
+                    </a:p>
+                  </a:txBody>
+                  <a:tcPr/>
+                </a:tc>
+                <a:tc>
+                  <a:txBody>
+                    <a:bodyPr/>
+                    <a:lstStyle/>
+                    <a:p>
+                      <a:r>
+                        <a:rPr sz="1100"/>
+                        <a:t>CTR, CVR</a:t>
+                      </a:r>
+                    </a:p>
+                  </a:txBody>
+                  <a:tcPr/>
+                </a:tc>
+                <a:tc>
+                  <a:txBody>
+                    <a:bodyPr/>
+                    <a:lstStyle/>
+                    <a:p>
+                      <a:r>
+                        <a:rPr sz="1100"/>
+                        <a:t>In test — Social mock-up shared, Shopping overlay trialling</a:t>
+                      </a:r>
+                    </a:p>
+                  </a:txBody>
+                  <a:tcPr/>
+                </a:tc>
+                <a:tc>
+                  <a:txBody>
+                    <a:bodyPr/>
+                    <a:lstStyle/>
+                    <a:p>
+                      <a:r>
+                        <a:rPr sz="1100"/>
+                        <a:t>TBC</a:t>
+                      </a:r>
+                    </a:p>
+                  </a:txBody>
+                  <a:tcPr/>
+                </a:tc>
+              </a:tr>
+              <a:tr h="568452">
+                <a:tc>
+                  <a:txBody>
+                    <a:bodyPr/>
+                    <a:lstStyle/>
+                    <a:p>
+                      <a:r>
+                        <a:rPr sz="1100"/>
+                        <a:t>Keyword &amp; peak planning</a:t>
+                      </a:r>
+                    </a:p>
+                  </a:txBody>
+                  <a:tcPr/>
+                </a:tc>
+                <a:tc>
+                  <a:txBody>
+                    <a:bodyPr/>
+                    <a:lstStyle/>
+                    <a:p>
+                      <a:r>
+                        <a:rPr sz="1100"/>
+                        <a:t>T5, T8</a:t>
+                      </a:r>
+                    </a:p>
+                  </a:txBody>
+                  <a:tcPr/>
+                </a:tc>
+                <a:tc>
+                  <a:txBody>
+                    <a:bodyPr/>
+                    <a:lstStyle/>
+                    <a:p>
+                      <a:r>
+                        <a:rPr sz="1100"/>
+                        <a:t>CVR, CTR</a:t>
+                      </a:r>
+                    </a:p>
+                  </a:txBody>
+                  <a:tcPr/>
+                </a:tc>
+                <a:tc>
+                  <a:txBody>
+                    <a:bodyPr/>
+                    <a:lstStyle/>
+                    <a:p>
+                      <a:r>
+                        <a:rPr sz="1100"/>
+                        <a:t>Awaiting promo calendar from EM</a:t>
+                      </a:r>
+                    </a:p>
+                  </a:txBody>
+                  <a:tcPr/>
+                </a:tc>
+                <a:tc>
+                  <a:txBody>
+                    <a:bodyPr/>
+                    <a:lstStyle/>
+                    <a:p>
+                      <a:r>
+                        <a:rPr sz="1100"/>
+                        <a:t>TBC</a:t>
+                      </a:r>
+                    </a:p>
+                  </a:txBody>
+                  <a:tcPr/>
+                </a:tc>
+              </a:tr>
+              <a:tr h="568452">
+                <a:tc>
+                  <a:txBody>
+                    <a:bodyPr/>
+                    <a:lstStyle/>
+                    <a:p>
+                      <a:r>
+                        <a:rPr sz="1100"/>
+                        <a:t>ALP — landing pages</a:t>
+                      </a:r>
+                    </a:p>
+                  </a:txBody>
+                  <a:tcPr/>
+                </a:tc>
+                <a:tc>
+                  <a:txBody>
+                    <a:bodyPr/>
+                    <a:lstStyle/>
+                    <a:p>
+                      <a:r>
+                        <a:rPr sz="1100"/>
+                        <a:t>—</a:t>
+                      </a:r>
+                    </a:p>
+                  </a:txBody>
+                  <a:tcPr/>
+                </a:tc>
+                <a:tc>
+                  <a:txBody>
+                    <a:bodyPr/>
+                    <a:lstStyle/>
+                    <a:p>
+                      <a:r>
+                        <a:rPr sz="1100"/>
+                        <a:t>Dwell, CVR</a:t>
+                      </a:r>
+                    </a:p>
+                  </a:txBody>
+                  <a:tcPr/>
+                </a:tc>
+                <a:tc>
+                  <a:txBody>
+                    <a:bodyPr/>
+                    <a:lstStyle/>
+                    <a:p>
+                      <a:r>
+                        <a:rPr sz="1100"/>
+                        <a:t>Not scoped</a:t>
+                      </a:r>
+                    </a:p>
+                  </a:txBody>
+                  <a:tcPr/>
+                </a:tc>
+                <a:tc>
+                  <a:txBody>
+                    <a:bodyPr/>
+                    <a:lstStyle/>
+                    <a:p>
+                      <a:r>
+                        <a:rPr sz="1100"/>
+                        <a:t>TBC</a:t>
+                      </a:r>
+                    </a:p>
+                  </a:txBody>
+                  <a:tcPr/>
+                </a:tc>
+              </a:tr>
+              <a:tr h="568452">
+                <a:tc>
+                  <a:txBody>
+                    <a:bodyPr/>
+                    <a:lstStyle/>
+                    <a:p>
+                      <a:r>
+                        <a:rPr sz="1100"/>
+                        <a:t>LIA reactivation</a:t>
+                      </a:r>
+                    </a:p>
+                  </a:txBody>
+                  <a:tcPr/>
+                </a:tc>
+                <a:tc>
+                  <a:txBody>
+                    <a:bodyPr/>
+                    <a:lstStyle/>
+                    <a:p>
+                      <a:r>
+                        <a:rPr sz="1100"/>
+                        <a:t>—</a:t>
+                      </a:r>
+                    </a:p>
+                  </a:txBody>
+                  <a:tcPr/>
+                </a:tc>
+                <a:tc>
+                  <a:txBody>
+                    <a:bodyPr/>
+                    <a:lstStyle/>
+                    <a:p>
+                      <a:r>
+                        <a:rPr sz="1100"/>
+                        <a:t>Store visibility</a:t>
+                      </a:r>
+                    </a:p>
+                  </a:txBody>
+                  <a:tcPr/>
+                </a:tc>
+                <a:tc>
+                  <a:txBody>
+                    <a:bodyPr/>
+                    <a:lstStyle/>
+                    <a:p>
+                      <a:r>
+                        <a:rPr sz="1100"/>
+                        <a:t>Open lane — store-ID work outstanding</a:t>
+                      </a:r>
+                    </a:p>
+                  </a:txBody>
+                  <a:tcPr/>
+                </a:tc>
+                <a:tc>
+                  <a:txBody>
+                    <a:bodyPr/>
+                    <a:lstStyle/>
+                    <a:p>
+                      <a:r>
+                        <a:rPr sz="1100"/>
+                        <a:t>TBC</a:t>
+                      </a:r>
+                    </a:p>
+                  </a:txBody>
+                  <a:tcPr/>
+                </a:tc>
+              </a:tr>
+            </a:tbl>
+          </a:graphicData>
+        </a:graphic>
+      </p:graphicFrame>
     </p:spTree>
   </p:cSld>
   <p:clrMapOvr>
